--- a/D_dashboard/deck/Dugong_Watch_Overview.pptx
+++ b/D_dashboard/deck/Dugong_Watch_Overview.pptx
@@ -1861,7 +1861,7 @@
             <a:r>
               <a:rPr lang="en-US" sz="1300" dirty="0">
                 <a:solidFill>
-                  <a:srgbClr val="64748B"/>
+                  <a:srgbClr val="475569"/>
                 </a:solidFill>
                 <a:latin typeface="Calibri" pitchFamily="34" charset="0"/>
                 <a:ea typeface="Calibri" pitchFamily="34" charset="-122"/>
@@ -1983,7 +1983,7 @@
             <a:r>
               <a:rPr lang="en-US" sz="1300" dirty="0">
                 <a:solidFill>
-                  <a:srgbClr val="64748B"/>
+                  <a:srgbClr val="475569"/>
                 </a:solidFill>
                 <a:latin typeface="Calibri" pitchFamily="34" charset="0"/>
                 <a:ea typeface="Calibri" pitchFamily="34" charset="-122"/>
@@ -2105,7 +2105,7 @@
             <a:r>
               <a:rPr lang="en-US" sz="1300" dirty="0">
                 <a:solidFill>
-                  <a:srgbClr val="64748B"/>
+                  <a:srgbClr val="475569"/>
                 </a:solidFill>
                 <a:latin typeface="Calibri" pitchFamily="34" charset="0"/>
                 <a:ea typeface="Calibri" pitchFamily="34" charset="-122"/>
@@ -2215,7 +2215,7 @@
             <a:r>
               <a:rPr lang="en-US" sz="1300" i="1" dirty="0">
                 <a:solidFill>
-                  <a:srgbClr val="64748B"/>
+                  <a:srgbClr val="475569"/>
                 </a:solidFill>
                 <a:latin typeface="Calibri" pitchFamily="34" charset="0"/>
                 <a:ea typeface="Calibri" pitchFamily="34" charset="-122"/>
@@ -2424,7 +2424,7 @@
             <a:r>
               <a:rPr lang="en-US" sz="1600" b="1" dirty="0">
                 <a:solidFill>
-                  <a:srgbClr val="64748B"/>
+                  <a:srgbClr val="475569"/>
                 </a:solidFill>
               </a:rPr>
               <a:t>›</a:t>
@@ -2630,7 +2630,7 @@
             <a:r>
               <a:rPr lang="en-US" sz="1600" b="1" dirty="0">
                 <a:solidFill>
-                  <a:srgbClr val="64748B"/>
+                  <a:srgbClr val="475569"/>
                 </a:solidFill>
               </a:rPr>
               <a:t>›</a:t>
@@ -2836,7 +2836,7 @@
             <a:r>
               <a:rPr lang="en-US" sz="1600" b="1" dirty="0">
                 <a:solidFill>
-                  <a:srgbClr val="64748B"/>
+                  <a:srgbClr val="475569"/>
                 </a:solidFill>
               </a:rPr>
               <a:t>›</a:t>
@@ -3042,7 +3042,7 @@
             <a:r>
               <a:rPr lang="en-US" sz="1600" b="1" dirty="0">
                 <a:solidFill>
-                  <a:srgbClr val="64748B"/>
+                  <a:srgbClr val="475569"/>
                 </a:solidFill>
               </a:rPr>
               <a:t>›</a:t>
@@ -3358,7 +3358,7 @@
             <a:r>
               <a:rPr lang="en-US" sz="1300" dirty="0">
                 <a:solidFill>
-                  <a:srgbClr val="64748B"/>
+                  <a:srgbClr val="475569"/>
                 </a:solidFill>
                 <a:latin typeface="Calibri" pitchFamily="34" charset="0"/>
                 <a:ea typeface="Calibri" pitchFamily="34" charset="-122"/>
@@ -3595,7 +3595,7 @@
             <a:r>
               <a:rPr lang="en-US" sz="1250" dirty="0">
                 <a:solidFill>
-                  <a:srgbClr val="64748B"/>
+                  <a:srgbClr val="475569"/>
                 </a:solidFill>
                 <a:latin typeface="Calibri" pitchFamily="34" charset="0"/>
                 <a:ea typeface="Calibri" pitchFamily="34" charset="-122"/>
@@ -3702,7 +3702,7 @@
             <a:r>
               <a:rPr lang="en-US" sz="1100" dirty="0">
                 <a:solidFill>
-                  <a:srgbClr val="64748B"/>
+                  <a:srgbClr val="475569"/>
                 </a:solidFill>
                 <a:latin typeface="Calibri" pitchFamily="34" charset="0"/>
                 <a:ea typeface="Calibri" pitchFamily="34" charset="-122"/>
@@ -3809,7 +3809,7 @@
             <a:r>
               <a:rPr lang="en-US" sz="1100" dirty="0">
                 <a:solidFill>
-                  <a:srgbClr val="64748B"/>
+                  <a:srgbClr val="475569"/>
                 </a:solidFill>
                 <a:latin typeface="Calibri" pitchFamily="34" charset="0"/>
                 <a:ea typeface="Calibri" pitchFamily="34" charset="-122"/>
@@ -3943,7 +3943,7 @@
             <a:r>
               <a:rPr lang="en-US" sz="1350" dirty="0">
                 <a:solidFill>
-                  <a:srgbClr val="64748B"/>
+                  <a:srgbClr val="475569"/>
                 </a:solidFill>
                 <a:latin typeface="Calibri" pitchFamily="34" charset="0"/>
                 <a:ea typeface="Calibri" pitchFamily="34" charset="-122"/>
